--- a/ゲーム科1年/00_前期/ゲームプログラミングⅢ/ゲーム数学/座学/18_ベクトルの正規化.pptx
+++ b/ゲーム科1年/00_前期/ゲームプログラミングⅢ/ゲーム数学/座学/18_ベクトルの正規化.pptx
@@ -264,7 +264,7 @@
           <a:p>
             <a:fld id="{E9CC885B-4903-4D54-9A93-00025F12DED9}" type="datetimeFigureOut">
               <a:rPr kumimoji="1" lang="ja-JP" altLang="en-US" smtClean="0"/>
-              <a:t>2024/10/11</a:t>
+              <a:t>2025/6/26</a:t>
             </a:fld>
             <a:endParaRPr kumimoji="1" lang="ja-JP" altLang="en-US"/>
           </a:p>
@@ -494,7 +494,7 @@
           <a:p>
             <a:fld id="{E9CC885B-4903-4D54-9A93-00025F12DED9}" type="datetimeFigureOut">
               <a:rPr kumimoji="1" lang="ja-JP" altLang="en-US" smtClean="0"/>
-              <a:t>2024/10/11</a:t>
+              <a:t>2025/6/26</a:t>
             </a:fld>
             <a:endParaRPr kumimoji="1" lang="ja-JP" altLang="en-US"/>
           </a:p>
@@ -734,7 +734,7 @@
           <a:p>
             <a:fld id="{E9CC885B-4903-4D54-9A93-00025F12DED9}" type="datetimeFigureOut">
               <a:rPr kumimoji="1" lang="ja-JP" altLang="en-US" smtClean="0"/>
-              <a:t>2024/10/11</a:t>
+              <a:t>2025/6/26</a:t>
             </a:fld>
             <a:endParaRPr kumimoji="1" lang="ja-JP" altLang="en-US"/>
           </a:p>
@@ -964,7 +964,7 @@
           <a:p>
             <a:fld id="{E9CC885B-4903-4D54-9A93-00025F12DED9}" type="datetimeFigureOut">
               <a:rPr kumimoji="1" lang="ja-JP" altLang="en-US" smtClean="0"/>
-              <a:t>2024/10/11</a:t>
+              <a:t>2025/6/26</a:t>
             </a:fld>
             <a:endParaRPr kumimoji="1" lang="ja-JP" altLang="en-US"/>
           </a:p>
@@ -1239,7 +1239,7 @@
           <a:p>
             <a:fld id="{E9CC885B-4903-4D54-9A93-00025F12DED9}" type="datetimeFigureOut">
               <a:rPr kumimoji="1" lang="ja-JP" altLang="en-US" smtClean="0"/>
-              <a:t>2024/10/11</a:t>
+              <a:t>2025/6/26</a:t>
             </a:fld>
             <a:endParaRPr kumimoji="1" lang="ja-JP" altLang="en-US"/>
           </a:p>
@@ -1568,7 +1568,7 @@
           <a:p>
             <a:fld id="{E9CC885B-4903-4D54-9A93-00025F12DED9}" type="datetimeFigureOut">
               <a:rPr kumimoji="1" lang="ja-JP" altLang="en-US" smtClean="0"/>
-              <a:t>2024/10/11</a:t>
+              <a:t>2025/6/26</a:t>
             </a:fld>
             <a:endParaRPr kumimoji="1" lang="ja-JP" altLang="en-US"/>
           </a:p>
@@ -2044,7 +2044,7 @@
           <a:p>
             <a:fld id="{E9CC885B-4903-4D54-9A93-00025F12DED9}" type="datetimeFigureOut">
               <a:rPr kumimoji="1" lang="ja-JP" altLang="en-US" smtClean="0"/>
-              <a:t>2024/10/11</a:t>
+              <a:t>2025/6/26</a:t>
             </a:fld>
             <a:endParaRPr kumimoji="1" lang="ja-JP" altLang="en-US"/>
           </a:p>
@@ -2185,7 +2185,7 @@
           <a:p>
             <a:fld id="{E9CC885B-4903-4D54-9A93-00025F12DED9}" type="datetimeFigureOut">
               <a:rPr kumimoji="1" lang="ja-JP" altLang="en-US" smtClean="0"/>
-              <a:t>2024/10/11</a:t>
+              <a:t>2025/6/26</a:t>
             </a:fld>
             <a:endParaRPr kumimoji="1" lang="ja-JP" altLang="en-US"/>
           </a:p>
@@ -2298,7 +2298,7 @@
           <a:p>
             <a:fld id="{E9CC885B-4903-4D54-9A93-00025F12DED9}" type="datetimeFigureOut">
               <a:rPr kumimoji="1" lang="ja-JP" altLang="en-US" smtClean="0"/>
-              <a:t>2024/10/11</a:t>
+              <a:t>2025/6/26</a:t>
             </a:fld>
             <a:endParaRPr kumimoji="1" lang="ja-JP" altLang="en-US"/>
           </a:p>
@@ -2641,7 +2641,7 @@
           <a:p>
             <a:fld id="{E9CC885B-4903-4D54-9A93-00025F12DED9}" type="datetimeFigureOut">
               <a:rPr kumimoji="1" lang="ja-JP" altLang="en-US" smtClean="0"/>
-              <a:t>2024/10/11</a:t>
+              <a:t>2025/6/26</a:t>
             </a:fld>
             <a:endParaRPr kumimoji="1" lang="ja-JP" altLang="en-US"/>
           </a:p>
@@ -2929,7 +2929,7 @@
           <a:p>
             <a:fld id="{E9CC885B-4903-4D54-9A93-00025F12DED9}" type="datetimeFigureOut">
               <a:rPr kumimoji="1" lang="ja-JP" altLang="en-US" smtClean="0"/>
-              <a:t>2024/10/11</a:t>
+              <a:t>2025/6/26</a:t>
             </a:fld>
             <a:endParaRPr kumimoji="1" lang="ja-JP" altLang="en-US"/>
           </a:p>
@@ -3202,7 +3202,7 @@
           <a:p>
             <a:fld id="{E9CC885B-4903-4D54-9A93-00025F12DED9}" type="datetimeFigureOut">
               <a:rPr kumimoji="1" lang="ja-JP" altLang="en-US" smtClean="0"/>
-              <a:t>2024/10/11</a:t>
+              <a:t>2025/6/26</a:t>
             </a:fld>
             <a:endParaRPr kumimoji="1" lang="ja-JP" altLang="en-US"/>
           </a:p>
@@ -3901,8 +3901,8 @@
           </a:p>
         </p:txBody>
       </p:sp>
-      <mc:AlternateContent xmlns:mc="http://schemas.openxmlformats.org/markup-compatibility/2006">
-        <mc:Choice xmlns:a14="http://schemas.microsoft.com/office/drawing/2010/main" Requires="a14">
+      <mc:AlternateContent xmlns:mc="http://schemas.openxmlformats.org/markup-compatibility/2006" xmlns:a14="http://schemas.microsoft.com/office/drawing/2010/main">
+        <mc:Choice Requires="a14">
           <p:sp>
             <p:nvSpPr>
               <p:cNvPr id="10" name="テキスト ボックス 9">
@@ -3952,7 +3952,7 @@
             </p:txBody>
           </p:sp>
         </mc:Choice>
-        <mc:Fallback>
+        <mc:Fallback xmlns="">
           <p:sp>
             <p:nvSpPr>
               <p:cNvPr id="10" name="テキスト ボックス 9">
@@ -4943,8 +4943,8 @@
           </a:p>
         </p:txBody>
       </p:sp>
-      <mc:AlternateContent xmlns:mc="http://schemas.openxmlformats.org/markup-compatibility/2006" xmlns:a14="http://schemas.microsoft.com/office/drawing/2010/main">
-        <mc:Choice Requires="a14">
+      <mc:AlternateContent xmlns:mc="http://schemas.openxmlformats.org/markup-compatibility/2006">
+        <mc:Choice xmlns:a14="http://schemas.microsoft.com/office/drawing/2010/main" Requires="a14">
           <p:sp>
             <p:nvSpPr>
               <p:cNvPr id="6" name="テキスト ボックス 5">
@@ -4959,7 +4959,7 @@
             </p:nvSpPr>
             <p:spPr>
               <a:xfrm>
-                <a:off x="567542" y="1216429"/>
+                <a:off x="567542" y="1224895"/>
                 <a:ext cx="9725739" cy="4033155"/>
               </a:xfrm>
               <a:prstGeom prst="rect">
@@ -5004,10 +5004,18 @@
               </a:p>
               <a:p>
                 <a:r>
-                  <a:rPr lang="ja-JP" altLang="en-US" sz="2400" dirty="0"/>
+                  <a:rPr lang="ja-JP" altLang="en-US" sz="2400" b="1" dirty="0">
+                    <a:solidFill>
+                      <a:srgbClr val="FF0000"/>
+                    </a:solidFill>
+                  </a:rPr>
                   <a:t>■解答</a:t>
                 </a:r>
-                <a:endParaRPr lang="en-US" altLang="ja-JP" sz="2400" dirty="0"/>
+                <a:endParaRPr lang="en-US" altLang="ja-JP" sz="2400" b="1" dirty="0">
+                  <a:solidFill>
+                    <a:srgbClr val="FF0000"/>
+                  </a:solidFill>
+                </a:endParaRPr>
               </a:p>
               <a:p>
                 <a:r>
@@ -5374,7 +5382,7 @@
             </p:txBody>
           </p:sp>
         </mc:Choice>
-        <mc:Fallback xmlns="">
+        <mc:Fallback>
           <p:sp>
             <p:nvSpPr>
               <p:cNvPr id="6" name="テキスト ボックス 5">
@@ -5391,7 +5399,7 @@
             </p:nvSpPr>
             <p:spPr>
               <a:xfrm>
-                <a:off x="567542" y="1216429"/>
+                <a:off x="567542" y="1224895"/>
                 <a:ext cx="9725739" cy="4033155"/>
               </a:xfrm>
               <a:prstGeom prst="rect">
@@ -5400,7 +5408,7 @@
               <a:blipFill>
                 <a:blip r:embed="rId2"/>
                 <a:stretch>
-                  <a:fillRect l="-940" t="-1210" b="-2572"/>
+                  <a:fillRect l="-940" t="-1208" b="-2417"/>
                 </a:stretch>
               </a:blipFill>
             </p:spPr>
